--- a/documentacion/fichas_curriculares/jaliscof/JALISCO-2025.pptx
+++ b/documentacion/fichas_curriculares/jaliscof/JALISCO-2025.pptx
@@ -112,6 +112,35 @@
 </p:presentation>
 </file>
 
+<file path=ppt/changesInfos/changesInfo1.xml><?xml version="1.0" encoding="utf-8"?>
+<pc:chgInfo xmlns:a="http://schemas.openxmlformats.org/drawingml/2006/main" xmlns:r="http://schemas.openxmlformats.org/officeDocument/2006/relationships" xmlns:ac="http://schemas.microsoft.com/office/drawing/2013/main/command" xmlns:pc="http://schemas.microsoft.com/office/powerpoint/2013/main/command">
+  <pc:docChgLst>
+    <pc:chgData name="Guillermo Jiménez Gómez" userId="e8e1a3bb2d1e013b" providerId="LiveId" clId="{8B545E47-9E58-4C28-85F5-B6C8A0B371B7}"/>
+    <pc:docChg chg="modSld">
+      <pc:chgData name="Guillermo Jiménez Gómez" userId="e8e1a3bb2d1e013b" providerId="LiveId" clId="{8B545E47-9E58-4C28-85F5-B6C8A0B371B7}" dt="2025-06-18T18:21:37.865" v="1" actId="20577"/>
+      <pc:docMkLst>
+        <pc:docMk/>
+      </pc:docMkLst>
+      <pc:sldChg chg="modSp mod">
+        <pc:chgData name="Guillermo Jiménez Gómez" userId="e8e1a3bb2d1e013b" providerId="LiveId" clId="{8B545E47-9E58-4C28-85F5-B6C8A0B371B7}" dt="2025-06-18T18:21:37.865" v="1" actId="20577"/>
+        <pc:sldMkLst>
+          <pc:docMk/>
+          <pc:sldMk cId="4165610468" sldId="256"/>
+        </pc:sldMkLst>
+        <pc:spChg chg="mod">
+          <ac:chgData name="Guillermo Jiménez Gómez" userId="e8e1a3bb2d1e013b" providerId="LiveId" clId="{8B545E47-9E58-4C28-85F5-B6C8A0B371B7}" dt="2025-06-18T18:21:37.865" v="1" actId="20577"/>
+          <ac:spMkLst>
+            <pc:docMk/>
+            <pc:sldMk cId="4165610468" sldId="256"/>
+            <ac:spMk id="20" creationId="{A03AE3FB-BBBB-4780-BEA0-348ED633AEF9}"/>
+          </ac:spMkLst>
+        </pc:spChg>
+      </pc:sldChg>
+    </pc:docChg>
+  </pc:docChgLst>
+</pc:chgInfo>
+</file>
+
 <file path=ppt/slideLayouts/slideLayout1.xml><?xml version="1.0" encoding="utf-8"?>
 <p:sldLayout xmlns:a="http://schemas.openxmlformats.org/drawingml/2006/main" xmlns:r="http://schemas.openxmlformats.org/officeDocument/2006/relationships" xmlns:p="http://schemas.openxmlformats.org/presentationml/2006/main" type="title" preserve="1">
   <p:cSld name="Diapositiva de título">
@@ -243,7 +272,7 @@
           <a:p>
             <a:fld id="{664CB750-BDA0-4B3C-9407-BAF21E562682}" type="datetimeFigureOut">
               <a:rPr lang="es-MX" smtClean="0"/>
-              <a:t>17.06.2025</a:t>
+              <a:t>18/06/2025</a:t>
             </a:fld>
             <a:endParaRPr lang="es-MX"/>
           </a:p>
@@ -413,7 +442,7 @@
           <a:p>
             <a:fld id="{664CB750-BDA0-4B3C-9407-BAF21E562682}" type="datetimeFigureOut">
               <a:rPr lang="es-MX" smtClean="0"/>
-              <a:t>17.06.2025</a:t>
+              <a:t>18/06/2025</a:t>
             </a:fld>
             <a:endParaRPr lang="es-MX"/>
           </a:p>
@@ -593,7 +622,7 @@
           <a:p>
             <a:fld id="{664CB750-BDA0-4B3C-9407-BAF21E562682}" type="datetimeFigureOut">
               <a:rPr lang="es-MX" smtClean="0"/>
-              <a:t>17.06.2025</a:t>
+              <a:t>18/06/2025</a:t>
             </a:fld>
             <a:endParaRPr lang="es-MX"/>
           </a:p>
@@ -763,7 +792,7 @@
           <a:p>
             <a:fld id="{664CB750-BDA0-4B3C-9407-BAF21E562682}" type="datetimeFigureOut">
               <a:rPr lang="es-MX" smtClean="0"/>
-              <a:t>17.06.2025</a:t>
+              <a:t>18/06/2025</a:t>
             </a:fld>
             <a:endParaRPr lang="es-MX"/>
           </a:p>
@@ -1007,7 +1036,7 @@
           <a:p>
             <a:fld id="{664CB750-BDA0-4B3C-9407-BAF21E562682}" type="datetimeFigureOut">
               <a:rPr lang="es-MX" smtClean="0"/>
-              <a:t>17.06.2025</a:t>
+              <a:t>18/06/2025</a:t>
             </a:fld>
             <a:endParaRPr lang="es-MX"/>
           </a:p>
@@ -1239,7 +1268,7 @@
           <a:p>
             <a:fld id="{664CB750-BDA0-4B3C-9407-BAF21E562682}" type="datetimeFigureOut">
               <a:rPr lang="es-MX" smtClean="0"/>
-              <a:t>17.06.2025</a:t>
+              <a:t>18/06/2025</a:t>
             </a:fld>
             <a:endParaRPr lang="es-MX"/>
           </a:p>
@@ -1606,7 +1635,7 @@
           <a:p>
             <a:fld id="{664CB750-BDA0-4B3C-9407-BAF21E562682}" type="datetimeFigureOut">
               <a:rPr lang="es-MX" smtClean="0"/>
-              <a:t>17.06.2025</a:t>
+              <a:t>18/06/2025</a:t>
             </a:fld>
             <a:endParaRPr lang="es-MX"/>
           </a:p>
@@ -1724,7 +1753,7 @@
           <a:p>
             <a:fld id="{664CB750-BDA0-4B3C-9407-BAF21E562682}" type="datetimeFigureOut">
               <a:rPr lang="es-MX" smtClean="0"/>
-              <a:t>17.06.2025</a:t>
+              <a:t>18/06/2025</a:t>
             </a:fld>
             <a:endParaRPr lang="es-MX"/>
           </a:p>
@@ -1819,7 +1848,7 @@
           <a:p>
             <a:fld id="{664CB750-BDA0-4B3C-9407-BAF21E562682}" type="datetimeFigureOut">
               <a:rPr lang="es-MX" smtClean="0"/>
-              <a:t>17.06.2025</a:t>
+              <a:t>18/06/2025</a:t>
             </a:fld>
             <a:endParaRPr lang="es-MX"/>
           </a:p>
@@ -2096,7 +2125,7 @@
           <a:p>
             <a:fld id="{664CB750-BDA0-4B3C-9407-BAF21E562682}" type="datetimeFigureOut">
               <a:rPr lang="es-MX" smtClean="0"/>
-              <a:t>17.06.2025</a:t>
+              <a:t>18/06/2025</a:t>
             </a:fld>
             <a:endParaRPr lang="es-MX"/>
           </a:p>
@@ -2353,7 +2382,7 @@
           <a:p>
             <a:fld id="{664CB750-BDA0-4B3C-9407-BAF21E562682}" type="datetimeFigureOut">
               <a:rPr lang="es-MX" smtClean="0"/>
-              <a:t>17.06.2025</a:t>
+              <a:t>18/06/2025</a:t>
             </a:fld>
             <a:endParaRPr lang="es-MX"/>
           </a:p>
@@ -2566,7 +2595,7 @@
           <a:p>
             <a:fld id="{664CB750-BDA0-4B3C-9407-BAF21E562682}" type="datetimeFigureOut">
               <a:rPr lang="es-MX" smtClean="0"/>
-              <a:t>17.06.2025</a:t>
+              <a:t>18/06/2025</a:t>
             </a:fld>
             <a:endParaRPr lang="es-MX"/>
           </a:p>
@@ -3578,7 +3607,7 @@
                 </a:solidFill>
                 <a:latin typeface="Montserrat" pitchFamily="2" charset="0"/>
               </a:rPr>
-              <a:t>     16/06/2025 - a la fecha: </a:t>
+              <a:t>     19/06/2025 - a la fecha: </a:t>
             </a:r>
             <a:r>
               <a:rPr lang="es-MX" sz="1000" dirty="0">
